--- a/OneDrive⇒SharePointファイルコピー欠落.pptx
+++ b/OneDrive⇒SharePointファイルコピー欠落.pptx
@@ -3654,15 +3654,35 @@
             </a:r>
             <a:r>
               <a:rPr lang="ja-JP" altLang="en-US" sz="1400" dirty="0"/>
-              <a:t>を利用しています。したがって、どの手法を用いても、根本的な原因は</a:t>
-            </a:r>
-            <a:r>
-              <a:rPr lang="en-US" altLang="ja-JP" sz="1400" dirty="0"/>
+              <a:t>を利用しています。したがって、どの手法を用いても、</a:t>
+            </a:r>
+            <a:r>
+              <a:rPr lang="ja-JP" altLang="en-US" sz="1400" dirty="0">
+                <a:solidFill>
+                  <a:srgbClr val="FF0000"/>
+                </a:solidFill>
+              </a:rPr>
+              <a:t>根本的な原因は</a:t>
+            </a:r>
+            <a:r>
+              <a:rPr lang="en-US" altLang="ja-JP" sz="1400" dirty="0">
+                <a:solidFill>
+                  <a:srgbClr val="FF0000"/>
+                </a:solidFill>
+              </a:rPr>
               <a:t>Graph API</a:t>
             </a:r>
             <a:r>
+              <a:rPr lang="ja-JP" altLang="en-US" sz="1400" dirty="0">
+                <a:solidFill>
+                  <a:srgbClr val="FF0000"/>
+                </a:solidFill>
+              </a:rPr>
+              <a:t>の挙動や制限に起因する可能性が高い</a:t>
+            </a:r>
+            <a:r>
               <a:rPr lang="ja-JP" altLang="en-US" sz="1400" dirty="0"/>
-              <a:t>の挙動や制限に起因する可能性が高いと考えられます。</a:t>
+              <a:t>と考えられます。</a:t>
             </a:r>
             <a:endParaRPr lang="en-US" altLang="ja-JP" sz="1400" dirty="0"/>
           </a:p>
@@ -3713,7 +3733,33 @@
                   <a:srgbClr val="C00000"/>
                 </a:solidFill>
               </a:rPr>
-              <a:t>が支配的な要因であると判断するのが妥当です。</a:t>
+              <a:t>が支配的な要因であると判断するのが妥当です、詳細は</a:t>
+            </a:r>
+            <a:r>
+              <a:rPr lang="en-US" altLang="ja-JP" sz="1400" dirty="0">
+                <a:solidFill>
+                  <a:srgbClr val="C00000"/>
+                </a:solidFill>
+                <a:hlinkClick r:id="rId3" action="ppaction://hlinksldjump"/>
+              </a:rPr>
+              <a:t>P4</a:t>
+            </a:r>
+            <a:r>
+              <a:rPr lang="ja-JP" altLang="en-US" sz="1400" dirty="0">
+                <a:solidFill>
+                  <a:srgbClr val="C00000"/>
+                </a:solidFill>
+                <a:hlinkClick r:id="rId3" action="ppaction://hlinksldjump"/>
+              </a:rPr>
+              <a:t>参照</a:t>
+            </a:r>
+            <a:r>
+              <a:rPr lang="ja-JP" altLang="en-US" sz="1400" dirty="0">
+                <a:solidFill>
+                  <a:srgbClr val="C00000"/>
+                </a:solidFill>
+              </a:rPr>
+              <a:t>。</a:t>
             </a:r>
           </a:p>
         </p:txBody>
@@ -4469,7 +4515,7 @@
           <p:nvPr>
             <p:extLst>
               <p:ext uri="{D42A27DB-BD31-4B8C-83A1-F6EECF244321}">
-                <p14:modId xmlns:p14="http://schemas.microsoft.com/office/powerpoint/2010/main" val="3075095523"/>
+                <p14:modId xmlns:p14="http://schemas.microsoft.com/office/powerpoint/2010/main" val="1931278382"/>
               </p:ext>
             </p:extLst>
           </p:nvPr>
@@ -4683,47 +4729,71 @@
                       </a:pPr>
                       <a:r>
                         <a:rPr lang="ja-JP" sz="1000" kern="0" dirty="0">
+                          <a:solidFill>
+                            <a:srgbClr val="FF0000"/>
+                          </a:solidFill>
                           <a:effectLst/>
                         </a:rPr>
                         <a:t>※　</a:t>
                       </a:r>
                       <a:r>
                         <a:rPr lang="en-US" sz="1000" kern="0" dirty="0" err="1">
+                          <a:solidFill>
+                            <a:srgbClr val="FF0000"/>
+                          </a:solidFill>
                           <a:effectLst/>
                         </a:rPr>
                         <a:t>GraphAPI</a:t>
                       </a:r>
                       <a:r>
                         <a:rPr lang="ja-JP" sz="1000" kern="0" dirty="0">
+                          <a:solidFill>
+                            <a:srgbClr val="FF0000"/>
+                          </a:solidFill>
                           <a:effectLst/>
                         </a:rPr>
                         <a:t>を利用するための</a:t>
                       </a:r>
                       <a:r>
                         <a:rPr lang="en-US" sz="1000" kern="0" dirty="0" err="1">
+                          <a:solidFill>
+                            <a:srgbClr val="FF0000"/>
+                          </a:solidFill>
                           <a:effectLst/>
                         </a:rPr>
                         <a:t>AppID</a:t>
                       </a:r>
                       <a:r>
                         <a:rPr lang="ja-JP" sz="1000" kern="0" dirty="0">
+                          <a:solidFill>
+                            <a:srgbClr val="FF0000"/>
+                          </a:solidFill>
                           <a:effectLst/>
                         </a:rPr>
                         <a:t>申請、登録が必要（</a:t>
                       </a:r>
                       <a:r>
                         <a:rPr lang="en-US" sz="1000" kern="0" dirty="0">
+                          <a:solidFill>
+                            <a:srgbClr val="FF0000"/>
+                          </a:solidFill>
                           <a:effectLst/>
                         </a:rPr>
                         <a:t>MCC</a:t>
                       </a:r>
                       <a:r>
                         <a:rPr lang="ja-JP" sz="1000" kern="0" dirty="0">
+                          <a:solidFill>
+                            <a:srgbClr val="FF0000"/>
+                          </a:solidFill>
                           <a:effectLst/>
                         </a:rPr>
                         <a:t>社内で申請処理できるもの）</a:t>
                       </a:r>
                       <a:endParaRPr lang="ja-JP" sz="1100" kern="100" dirty="0">
+                        <a:solidFill>
+                          <a:srgbClr val="FF0000"/>
+                        </a:solidFill>
                         <a:effectLst/>
                         <a:latin typeface="游明朝" panose="02020400000000000000" pitchFamily="18" charset="-128"/>
                         <a:ea typeface="游明朝" panose="02020400000000000000" pitchFamily="18" charset="-128"/>
@@ -4773,12 +4843,12 @@
                         <a:buNone/>
                       </a:pPr>
                       <a:r>
-                        <a:rPr lang="ja-JP" sz="1000" kern="0">
+                        <a:rPr lang="ja-JP" sz="1000" kern="0" dirty="0">
                           <a:effectLst/>
                         </a:rPr>
                         <a:t>困難。実行履歴でしか確認できず、リアルタイム性に欠ける。</a:t>
                       </a:r>
-                      <a:endParaRPr lang="ja-JP" sz="1100" kern="100">
+                      <a:endParaRPr lang="ja-JP" sz="1100" kern="100" dirty="0">
                         <a:effectLst/>
                         <a:latin typeface="游明朝" panose="02020400000000000000" pitchFamily="18" charset="-128"/>
                         <a:ea typeface="游明朝" panose="02020400000000000000" pitchFamily="18" charset="-128"/>
@@ -4864,12 +4934,12 @@
                         <a:buNone/>
                       </a:pPr>
                       <a:r>
-                        <a:rPr lang="ja-JP" sz="1000" kern="0">
+                        <a:rPr lang="ja-JP" sz="1000" kern="0" dirty="0">
                           <a:effectLst/>
                         </a:rPr>
-                        <a:t>限定的。トリガーによる自動実行がメイン。</a:t>
+                        <a:t>限定的。トリガーによる実行がメイン。</a:t>
                       </a:r>
-                      <a:endParaRPr lang="ja-JP" sz="1100" kern="100">
+                      <a:endParaRPr lang="ja-JP" sz="1100" kern="100" dirty="0">
                         <a:effectLst/>
                         <a:latin typeface="游明朝" panose="02020400000000000000" pitchFamily="18" charset="-128"/>
                         <a:ea typeface="游明朝" panose="02020400000000000000" pitchFamily="18" charset="-128"/>
@@ -4994,7 +5064,22 @@
                         <a:rPr lang="ja-JP" sz="1000" kern="0" dirty="0">
                           <a:effectLst/>
                         </a:rPr>
-                        <a:t>非常に高い。リトライロジックや詳細なエラーログを即時生成。</a:t>
+                        <a:t>非常に高い。</a:t>
+                      </a:r>
+                      <a:r>
+                        <a:rPr lang="ja-JP" sz="1000" kern="0" dirty="0">
+                          <a:solidFill>
+                            <a:srgbClr val="FF0000"/>
+                          </a:solidFill>
+                          <a:effectLst/>
+                        </a:rPr>
+                        <a:t>リトライロジックや詳細なエラーログ</a:t>
+                      </a:r>
+                      <a:r>
+                        <a:rPr lang="ja-JP" sz="1000" kern="0" dirty="0">
+                          <a:effectLst/>
+                        </a:rPr>
+                        <a:t>を即時生成。</a:t>
                       </a:r>
                       <a:endParaRPr lang="ja-JP" sz="1100" kern="100" dirty="0">
                         <a:effectLst/>
@@ -5215,6 +5300,25 @@
               <a:rPr lang="ja-JP" altLang="ja-JP" dirty="0"/>
               <a:t>の制限（スロットリング）</a:t>
             </a:r>
+            <a:br>
+              <a:rPr lang="en-US" altLang="ja-JP" dirty="0"/>
+            </a:br>
+            <a:r>
+              <a:rPr lang="en-US" altLang="ja-JP" dirty="0">
+                <a:solidFill>
+                  <a:srgbClr val="FF0000"/>
+                </a:solidFill>
+              </a:rPr>
+              <a:t>Error 429 </a:t>
+            </a:r>
+            <a:r>
+              <a:rPr lang="en-US" altLang="ja-JP" b="1" dirty="0">
+                <a:solidFill>
+                  <a:srgbClr val="FF0000"/>
+                </a:solidFill>
+              </a:rPr>
+              <a:t>Too Many Requests</a:t>
+            </a:r>
             <a:endParaRPr lang="ja-JP" altLang="en-US" dirty="0">
               <a:latin typeface="Meiryo UI" panose="020B0604030504040204" pitchFamily="34" charset="-128"/>
               <a:ea typeface="Meiryo UI" panose="020B0604030504040204" pitchFamily="34" charset="-128"/>
@@ -5880,7 +5984,11 @@
               <a:t>どの制限に先に達しても</a:t>
             </a:r>
             <a:r>
-              <a:rPr lang="en-US" altLang="ja-JP" sz="1000" dirty="0"/>
+              <a:rPr lang="en-US" altLang="ja-JP" sz="1000" b="1" dirty="0">
+                <a:solidFill>
+                  <a:srgbClr val="FF0000"/>
+                </a:solidFill>
+              </a:rPr>
               <a:t>429 Too Many Requests</a:t>
             </a:r>
             <a:r>
